--- a/lectures/lec1_intro.pptx
+++ b/lectures/lec1_intro.pptx
@@ -6799,59 +6799,6 @@
       </p:sp>
       <p:sp>
         <p:nvSpPr>
-          <p:cNvPr id="3" name="Title 2"/>
-          <p:cNvSpPr>
-            <a:spLocks noGrp="1"/>
-          </p:cNvSpPr>
-          <p:nvPr>
-            <p:ph type="ctrTitle"/>
-          </p:nvPr>
-        </p:nvSpPr>
-        <p:spPr>
-          <a:xfrm>
-            <a:off x="683568" y="1484786"/>
-            <a:ext cx="7772400" cy="1326009"/>
-          </a:xfrm>
-        </p:spPr>
-        <p:txBody>
-          <a:bodyPr/>
-          <a:lstStyle/>
-          <a:p>
-            <a:pPr latinLnBrk="0"/>
-            <a:r>
-              <a:rPr lang="en-US" altLang="zh-CN" sz="3600" dirty="0"/>
-              <a:t>CSCI3150</a:t>
-            </a:r>
-            <a:r>
-              <a:rPr lang="zh-CN" altLang="en-US" sz="3600" dirty="0"/>
-              <a:t> </a:t>
-            </a:r>
-            <a:r>
-              <a:rPr lang="en-US" altLang="zh-CN" sz="3600" dirty="0"/>
-              <a:t>Introduction</a:t>
-            </a:r>
-            <a:r>
-              <a:rPr lang="zh-CN" altLang="en-US" sz="3600" dirty="0"/>
-              <a:t> </a:t>
-            </a:r>
-            <a:r>
-              <a:rPr lang="en-US" altLang="zh-CN" sz="3600" dirty="0"/>
-              <a:t>to</a:t>
-            </a:r>
-            <a:r>
-              <a:rPr lang="zh-CN" altLang="en-US" sz="3600" dirty="0"/>
-              <a:t> </a:t>
-            </a:r>
-            <a:r>
-              <a:rPr lang="en-US" sz="3600" dirty="0"/>
-              <a:t>Operating Systems</a:t>
-            </a:r>
-            <a:endParaRPr lang="en-US" sz="1600" b="0" dirty="0"/>
-          </a:p>
-        </p:txBody>
-      </p:sp>
-      <p:sp>
-        <p:nvSpPr>
           <p:cNvPr id="4" name="TextBox 3">
             <a:extLst>
               <a:ext uri="{FF2B5EF4-FFF2-40B4-BE49-F238E27FC236}">
@@ -6976,6 +6923,142 @@
               <a:latin typeface="Arial" panose="020B0604020202020204" pitchFamily="34" charset="0"/>
               <a:ea typeface="굴림"/>
               <a:cs typeface="Arial" panose="020B0604020202020204" pitchFamily="34" charset="0"/>
+            </a:endParaRPr>
+          </a:p>
+        </p:txBody>
+      </p:sp>
+      <p:sp>
+        <p:nvSpPr>
+          <p:cNvPr id="7" name="Title 2">
+            <a:extLst>
+              <a:ext uri="{FF2B5EF4-FFF2-40B4-BE49-F238E27FC236}">
+                <a16:creationId xmlns:a16="http://schemas.microsoft.com/office/drawing/2014/main" id="{1B699557-3F67-6C4F-DE7C-E6BECC617892}"/>
+              </a:ext>
+            </a:extLst>
+          </p:cNvPr>
+          <p:cNvSpPr>
+            <a:spLocks noGrp="1"/>
+          </p:cNvSpPr>
+          <p:nvPr>
+            <p:ph type="ctrTitle"/>
+          </p:nvPr>
+        </p:nvSpPr>
+        <p:spPr>
+          <a:xfrm>
+            <a:off x="683568" y="1484786"/>
+            <a:ext cx="7772400" cy="1326009"/>
+          </a:xfrm>
+          <a:effectLst/>
+        </p:spPr>
+        <p:txBody>
+          <a:bodyPr/>
+          <a:lstStyle/>
+          <a:p>
+            <a:pPr latinLnBrk="0"/>
+            <a:r>
+              <a:rPr lang="en-US" altLang="zh-CN" sz="3600" dirty="0">
+                <a:solidFill>
+                  <a:schemeClr val="accent1">
+                    <a:lumMod val="75000"/>
+                  </a:schemeClr>
+                </a:solidFill>
+                <a:latin typeface="Helvetica Neue" panose="02000503000000020004" pitchFamily="2" charset="0"/>
+                <a:ea typeface="Helvetica Neue" panose="02000503000000020004" pitchFamily="2" charset="0"/>
+                <a:cs typeface="Helvetica Neue" panose="02000503000000020004" pitchFamily="2" charset="0"/>
+              </a:rPr>
+              <a:t>CSCI3150</a:t>
+            </a:r>
+            <a:r>
+              <a:rPr lang="zh-CN" altLang="en-US" sz="3600" dirty="0">
+                <a:solidFill>
+                  <a:schemeClr val="accent1">
+                    <a:lumMod val="75000"/>
+                  </a:schemeClr>
+                </a:solidFill>
+                <a:latin typeface="Helvetica Neue" panose="02000503000000020004" pitchFamily="2" charset="0"/>
+                <a:cs typeface="Helvetica Neue" panose="02000503000000020004" pitchFamily="2" charset="0"/>
+              </a:rPr>
+              <a:t> </a:t>
+            </a:r>
+            <a:r>
+              <a:rPr lang="en-US" altLang="zh-CN" sz="3600" dirty="0">
+                <a:solidFill>
+                  <a:schemeClr val="accent1">
+                    <a:lumMod val="75000"/>
+                  </a:schemeClr>
+                </a:solidFill>
+                <a:latin typeface="Helvetica Neue" panose="02000503000000020004" pitchFamily="2" charset="0"/>
+                <a:ea typeface="Helvetica Neue" panose="02000503000000020004" pitchFamily="2" charset="0"/>
+                <a:cs typeface="Helvetica Neue" panose="02000503000000020004" pitchFamily="2" charset="0"/>
+              </a:rPr>
+              <a:t>Introduction</a:t>
+            </a:r>
+            <a:r>
+              <a:rPr lang="zh-CN" altLang="en-US" sz="3600" dirty="0">
+                <a:solidFill>
+                  <a:schemeClr val="accent1">
+                    <a:lumMod val="75000"/>
+                  </a:schemeClr>
+                </a:solidFill>
+                <a:latin typeface="Helvetica Neue" panose="02000503000000020004" pitchFamily="2" charset="0"/>
+                <a:cs typeface="Helvetica Neue" panose="02000503000000020004" pitchFamily="2" charset="0"/>
+              </a:rPr>
+              <a:t> </a:t>
+            </a:r>
+            <a:r>
+              <a:rPr lang="en-US" altLang="zh-CN" sz="3600" dirty="0">
+                <a:solidFill>
+                  <a:schemeClr val="accent1">
+                    <a:lumMod val="75000"/>
+                  </a:schemeClr>
+                </a:solidFill>
+                <a:latin typeface="Helvetica Neue" panose="02000503000000020004" pitchFamily="2" charset="0"/>
+                <a:ea typeface="Helvetica Neue" panose="02000503000000020004" pitchFamily="2" charset="0"/>
+                <a:cs typeface="Helvetica Neue" panose="02000503000000020004" pitchFamily="2" charset="0"/>
+              </a:rPr>
+              <a:t>to</a:t>
+            </a:r>
+            <a:r>
+              <a:rPr lang="zh-CN" altLang="en-US" sz="3600" dirty="0">
+                <a:solidFill>
+                  <a:schemeClr val="accent1">
+                    <a:lumMod val="75000"/>
+                  </a:schemeClr>
+                </a:solidFill>
+                <a:latin typeface="Helvetica Neue" panose="02000503000000020004" pitchFamily="2" charset="0"/>
+                <a:cs typeface="Helvetica Neue" panose="02000503000000020004" pitchFamily="2" charset="0"/>
+              </a:rPr>
+              <a:t> </a:t>
+            </a:r>
+            <a:br>
+              <a:rPr lang="en-HK" altLang="zh-CN" sz="3600" dirty="0">
+                <a:solidFill>
+                  <a:schemeClr val="accent1">
+                    <a:lumMod val="75000"/>
+                  </a:schemeClr>
+                </a:solidFill>
+                <a:latin typeface="Helvetica Neue" panose="02000503000000020004" pitchFamily="2" charset="0"/>
+                <a:ea typeface="Helvetica Neue" panose="02000503000000020004" pitchFamily="2" charset="0"/>
+                <a:cs typeface="Helvetica Neue" panose="02000503000000020004" pitchFamily="2" charset="0"/>
+              </a:rPr>
+            </a:br>
+            <a:r>
+              <a:rPr lang="en-US" sz="3600" dirty="0">
+                <a:solidFill>
+                  <a:schemeClr val="accent1">
+                    <a:lumMod val="75000"/>
+                  </a:schemeClr>
+                </a:solidFill>
+                <a:latin typeface="Helvetica Neue" panose="02000503000000020004" pitchFamily="2" charset="0"/>
+                <a:ea typeface="Helvetica Neue" panose="02000503000000020004" pitchFamily="2" charset="0"/>
+                <a:cs typeface="Helvetica Neue" panose="02000503000000020004" pitchFamily="2" charset="0"/>
+              </a:rPr>
+              <a:t>Operating Systems</a:t>
+            </a:r>
+            <a:endParaRPr lang="en-US" sz="1600" b="0" dirty="0">
+              <a:latin typeface="Helvetica Neue" panose="02000503000000020004" pitchFamily="2" charset="0"/>
+              <a:ea typeface="Helvetica Neue" panose="02000503000000020004" pitchFamily="2" charset="0"/>
+              <a:cs typeface="Helvetica Neue" panose="02000503000000020004" pitchFamily="2" charset="0"/>
             </a:endParaRPr>
           </a:p>
         </p:txBody>
